--- a/presentacion/Proyecto_Integrador_ENOE.pptx
+++ b/presentacion/Proyecto_Integrador_ENOE.pptx
@@ -1522,7 +1522,7 @@
           <a:lstStyle/>
           <a:p>
             <a:r>
-              <a:t>Es importante ser honestos con los límites. Son asociaciones y no causalidad: el rendimiento de estudiar mezcla el efecto de la escolaridad con habilidad no observada. Solo vemos el ingreso de quien trabaja y lo declara, así que hay selección; la mitigamos con ponderación por no respuesta e imputación por rangos, pero no la eliminamos. El ingreso por hora se calcula con las horas de una sola semana. Es un solo trimestre. Y por estado tenemos entre mil novecientas y cinco mil novecientas observaciones, por eso reportamos intervalos. Dos aclaraciones técnicas: no cargamos los documentos a un servidor MongoDB real porque no hay uno instalado, y el significado literal de los códigos de rangos de salarios mínimos lo inferimos de su correspondencia exacta con otra variable. Con más tiempo: varios trimestres con el panel rotativo, corrección por selección de Heckman, un mapa geográfico real y estimaciones para áreas pequeñas.</a:t>
+              <a:t>Es importante ser honestos con los límites. Son asociaciones y no causalidad: el rendimiento de estudiar mezcla el efecto de la escolaridad con habilidad no observada. Solo vemos el ingreso de quien trabaja y lo declara, así que hay selección; la mitigamos con ponderación por no respuesta e imputación por rangos, pero no la eliminamos. El ingreso por hora se calcula con las horas de una sola semana. Es un solo trimestre. Y por estado tenemos entre mil novecientas y cinco mil novecientas observaciones, por eso reportamos intervalos. Dos aclaraciones técnicas: no cargamos los documentos a un servidor MongoDB real porque no hay uno instalado (se probó con un simulador, mongomock), y el significado literal de los códigos de rangos de salarios mínimos lo inferimos de su correspondencia exacta con otra variable. Con más tiempo: varios trimestres con el panel rotativo, corrección por selección de Heckman, un mapa geográfico real y estimaciones para áreas pequeñas.</a:t>
             </a:r>
           </a:p>
         </p:txBody>
@@ -2432,7 +2432,7 @@
           <a:lstStyle/>
           <a:p>
             <a:r>
-              <a:t>Aquí está la ingeniería de datos y la justificación del modelo. Los microdatos entran a un pipeline en Python que extrae, limpia, transforma y valida, y carga a SQLite con esquema en estrella, con llaves primarias, foráneas y restricciones CHECK. Los datos de la ENOE son tabulares, así que para analizar el modelo relacional es el adecuado. Pero para servir la ficha de una entidad a un tablero conviene un modelo documental: un documento por entidad con los indicadores anidados, sin joins, con esquema flexible. SQLite es la fuente de verdad y MongoDB es una vista de lectura que se regenera. Aclaración honesta: verificamos que la agregación de Mongo reproduce la vista SQL, pero no cargamos a un servidor real porque no hay uno instalado; los documentos están listos para mongoimport.</a:t>
+              <a:t>Aquí está la ingeniería de datos y la justificación del modelo. Los microdatos entran a un pipeline en Python que extrae, limpia, transforma y valida, y carga a SQLite con esquema en estrella, con llaves primarias, foráneas y restricciones CHECK. Los datos de la ENOE son tabulares, así que para analizar el modelo relacional es el adecuado. Pero para servir la ficha de una entidad a un tablero conviene un modelo documental: un documento por entidad con los indicadores anidados, sin joins, con esquema flexible. SQLite es la fuente de verdad y MongoDB es una vista de lectura que se regenera. Aclaración honesta: verificamos que la agregación de Mongo reproduce la vista SQL, pero no cargamos a un servidor real porque no hay uno instalado; la carga completa se probó con mongomock, un simulador, y los documentos están listos para mongoimport.</a:t>
             </a:r>
           </a:p>
         </p:txBody>
@@ -9742,7 +9742,7 @@
                   <a:schemeClr val="tx1"/>
                 </a:solidFill>
               </a:rPr>
-              <a:t>MongoDB: documentos verificados, carga a servidor real pendiente</a:t>
+              <a:t>MongoDB: probado con mongomock; carga a servidor real pendiente</a:t>
             </a:r>
           </a:p>
         </p:txBody>

--- a/presentacion/Proyecto_Integrador_ENOE.pptx
+++ b/presentacion/Proyecto_Integrador_ENOE.pptx
@@ -5712,7 +5712,7 @@
                   <a:schemeClr val="bg1"/>
                 </a:solidFill>
               </a:rPr>
-              <a:t>Juan Evelio Culin Grajeda · Angel Yireh Garcia Jara · Luis Andre Gutierrez Zuñia</a:t>
+              <a:t>Juan Evelio Culin Grajeda · Angel Yireh Garcia Jara · Luis Andre Gutierrez Zuñiga</a:t>
             </a:r>
           </a:p>
           <a:p>
